--- a/CDQ24/Theory/09-QAOA.pptx
+++ b/CDQ24/Theory/09-QAOA.pptx
@@ -419,7 +419,7 @@
           <a:p>
             <a:fld id="{6620EB4E-959F-0D46-A670-A856F2184D0B}" type="datetimeFigureOut">
               <a:rPr lang="pt-PT" smtClean="0"/>
-              <a:t>07/05/24</a:t>
+              <a:t>16/07/24</a:t>
             </a:fld>
             <a:endParaRPr lang="pt-PT"/>
           </a:p>
@@ -872,7 +872,7 @@
           <a:p>
             <a:fld id="{EE4B6A45-56F1-C846-8E71-5B49EA88C3C8}" type="datetime1">
               <a:rPr lang="pt-PT" smtClean="0"/>
-              <a:t>07/05/24</a:t>
+              <a:t>16/07/24</a:t>
             </a:fld>
             <a:endParaRPr lang="en-US" dirty="0"/>
           </a:p>
@@ -1142,7 +1142,7 @@
           <a:p>
             <a:fld id="{6D6B35F1-A35F-CD43-9414-A19103BF4A8A}" type="datetime1">
               <a:rPr lang="pt-PT" smtClean="0"/>
-              <a:t>07/05/24</a:t>
+              <a:t>16/07/24</a:t>
             </a:fld>
             <a:endParaRPr lang="en-US" dirty="0"/>
           </a:p>
@@ -1331,7 +1331,7 @@
           <a:p>
             <a:fld id="{86F7DFCA-7A9A-534B-A08C-570FD2973B39}" type="datetime1">
               <a:rPr lang="pt-PT" smtClean="0"/>
-              <a:t>07/05/24</a:t>
+              <a:t>16/07/24</a:t>
             </a:fld>
             <a:endParaRPr lang="en-US" dirty="0"/>
           </a:p>
@@ -1599,7 +1599,7 @@
           <a:p>
             <a:fld id="{61CDED13-E2E8-1344-A0B7-FF1E3C6B8C12}" type="datetime1">
               <a:rPr lang="pt-PT" smtClean="0"/>
-              <a:t>07/05/24</a:t>
+              <a:t>16/07/24</a:t>
             </a:fld>
             <a:endParaRPr lang="en-US" dirty="0"/>
           </a:p>
@@ -1935,7 +1935,7 @@
           <a:p>
             <a:fld id="{E18C912C-0342-3442-8E0D-BEA7DA93FB1B}" type="datetime1">
               <a:rPr lang="pt-PT" smtClean="0"/>
-              <a:t>07/05/24</a:t>
+              <a:t>16/07/24</a:t>
             </a:fld>
             <a:endParaRPr lang="en-US" dirty="0"/>
           </a:p>
@@ -2553,7 +2553,7 @@
           <a:p>
             <a:fld id="{DCBE8522-062B-C443-852D-228F8089B563}" type="datetime1">
               <a:rPr lang="pt-PT" smtClean="0"/>
-              <a:t>07/05/24</a:t>
+              <a:t>16/07/24</a:t>
             </a:fld>
             <a:endParaRPr lang="en-US" dirty="0"/>
           </a:p>
@@ -3408,7 +3408,7 @@
           <a:p>
             <a:fld id="{09E8A23D-423C-A847-9420-DB8D4AF52B9D}" type="datetime1">
               <a:rPr lang="pt-PT" smtClean="0"/>
-              <a:t>07/05/24</a:t>
+              <a:t>16/07/24</a:t>
             </a:fld>
             <a:endParaRPr lang="en-US" dirty="0"/>
           </a:p>
@@ -3573,7 +3573,7 @@
           <a:p>
             <a:fld id="{2410CB8F-49A0-114D-98BC-06E165CA2AEA}" type="datetime1">
               <a:rPr lang="pt-PT" smtClean="0"/>
-              <a:t>07/05/24</a:t>
+              <a:t>16/07/24</a:t>
             </a:fld>
             <a:endParaRPr lang="en-US" dirty="0"/>
           </a:p>
@@ -3748,7 +3748,7 @@
           <a:p>
             <a:fld id="{C0D0510C-BF21-144A-913E-5B23B229D1F5}" type="datetime1">
               <a:rPr lang="pt-PT" smtClean="0"/>
-              <a:t>07/05/24</a:t>
+              <a:t>16/07/24</a:t>
             </a:fld>
             <a:endParaRPr lang="en-US" dirty="0"/>
           </a:p>
@@ -3913,7 +3913,7 @@
           <a:p>
             <a:fld id="{4F3DADA3-C076-F144-8C22-B781CAF409F4}" type="datetime1">
               <a:rPr lang="pt-PT" smtClean="0"/>
-              <a:t>07/05/24</a:t>
+              <a:t>16/07/24</a:t>
             </a:fld>
             <a:endParaRPr lang="en-US" dirty="0"/>
           </a:p>
@@ -4155,7 +4155,7 @@
           <a:p>
             <a:fld id="{491C3C12-0A97-BE4C-B22B-4AB10E3F69B2}" type="datetime1">
               <a:rPr lang="pt-PT" smtClean="0"/>
-              <a:t>07/05/24</a:t>
+              <a:t>16/07/24</a:t>
             </a:fld>
             <a:endParaRPr lang="en-US" dirty="0"/>
           </a:p>
@@ -4442,7 +4442,7 @@
           <a:p>
             <a:fld id="{8D1D1B82-305D-5241-B5A4-17232108C33A}" type="datetime1">
               <a:rPr lang="pt-PT" smtClean="0"/>
-              <a:t>07/05/24</a:t>
+              <a:t>16/07/24</a:t>
             </a:fld>
             <a:endParaRPr lang="en-US" dirty="0"/>
           </a:p>
@@ -4881,7 +4881,7 @@
           <a:p>
             <a:fld id="{0536ADD2-1453-1A47-A02A-BFB24AD2528B}" type="datetime1">
               <a:rPr lang="pt-PT" smtClean="0"/>
-              <a:t>07/05/24</a:t>
+              <a:t>16/07/24</a:t>
             </a:fld>
             <a:endParaRPr lang="en-US" dirty="0"/>
           </a:p>
@@ -4994,7 +4994,7 @@
           <a:p>
             <a:fld id="{1905EA20-CCD1-594A-978D-25109ACE93B1}" type="datetime1">
               <a:rPr lang="pt-PT" smtClean="0"/>
-              <a:t>07/05/24</a:t>
+              <a:t>16/07/24</a:t>
             </a:fld>
             <a:endParaRPr lang="en-US" dirty="0"/>
           </a:p>
@@ -5084,7 +5084,7 @@
           <a:p>
             <a:fld id="{3D1B2EA4-DC4D-A445-8404-FBEA2446C09B}" type="datetime1">
               <a:rPr lang="pt-PT" smtClean="0"/>
-              <a:t>07/05/24</a:t>
+              <a:t>16/07/24</a:t>
             </a:fld>
             <a:endParaRPr lang="en-US" dirty="0"/>
           </a:p>
@@ -5358,7 +5358,7 @@
           <a:p>
             <a:fld id="{E7FF759F-A1C6-BC44-B2C8-E7179212478E}" type="datetime1">
               <a:rPr lang="pt-PT" smtClean="0"/>
-              <a:t>07/05/24</a:t>
+              <a:t>16/07/24</a:t>
             </a:fld>
             <a:endParaRPr lang="en-US" dirty="0"/>
           </a:p>
@@ -5628,7 +5628,7 @@
           <a:p>
             <a:fld id="{8B4D5743-F5D1-7C42-B1E9-7ABE4861CD8E}" type="datetime1">
               <a:rPr lang="pt-PT" smtClean="0"/>
-              <a:t>07/05/24</a:t>
+              <a:t>16/07/24</a:t>
             </a:fld>
             <a:endParaRPr lang="en-US" dirty="0"/>
           </a:p>
@@ -6052,7 +6052,7 @@
           <a:p>
             <a:fld id="{0B07DAF3-CB27-0543-8701-6CCEAE41E5F9}" type="datetime1">
               <a:rPr lang="pt-PT" smtClean="0"/>
-              <a:t>07/05/24</a:t>
+              <a:t>16/07/24</a:t>
             </a:fld>
             <a:endParaRPr lang="en-US" dirty="0"/>
           </a:p>
@@ -8095,8 +8095,8 @@
           </a:p>
         </p:txBody>
       </p:sp>
-      <mc:AlternateContent xmlns:mc="http://schemas.openxmlformats.org/markup-compatibility/2006" xmlns:a14="http://schemas.microsoft.com/office/drawing/2010/main">
-        <mc:Choice Requires="a14">
+      <mc:AlternateContent xmlns:mc="http://schemas.openxmlformats.org/markup-compatibility/2006">
+        <mc:Choice xmlns:a14="http://schemas.microsoft.com/office/drawing/2010/main" Requires="a14">
           <p:sp>
             <p:nvSpPr>
               <p:cNvPr id="3" name="Marcador de Posição de Conteúdo 2">
@@ -8209,6 +8209,13 @@
                             <a:ea typeface="Cambria Math" panose="02040503050406030204" pitchFamily="18" charset="0"/>
                           </a:rPr>
                           <m:t>𝒊</m:t>
+                        </m:r>
+                        <m:r>
+                          <a:rPr lang="pt-PT" b="1" i="1">
+                            <a:latin typeface="Cambria Math" panose="02040503050406030204" pitchFamily="18" charset="0"/>
+                            <a:ea typeface="Cambria Math" panose="02040503050406030204" pitchFamily="18" charset="0"/>
+                          </a:rPr>
+                          <m:t>∝</m:t>
                         </m:r>
                         <m:sSub>
                           <m:sSubPr>
@@ -9783,7 +9790,7 @@
             </p:txBody>
           </p:sp>
         </mc:Choice>
-        <mc:Fallback xmlns="">
+        <mc:Fallback>
           <p:sp>
             <p:nvSpPr>
               <p:cNvPr id="3" name="Marcador de Posição de Conteúdo 2">
@@ -14073,8 +14080,8 @@
           </p:sp>
         </mc:Fallback>
       </mc:AlternateContent>
-      <mc:AlternateContent xmlns:mc="http://schemas.openxmlformats.org/markup-compatibility/2006">
-        <mc:Choice xmlns:a14="http://schemas.microsoft.com/office/drawing/2010/main" Requires="a14">
+      <mc:AlternateContent xmlns:mc="http://schemas.openxmlformats.org/markup-compatibility/2006" xmlns:a14="http://schemas.microsoft.com/office/drawing/2010/main">
+        <mc:Choice Requires="a14">
           <p:sp>
             <p:nvSpPr>
               <p:cNvPr id="3" name="Marcador de Posição de Conteúdo 2">
@@ -14854,7 +14861,7 @@
             </p:txBody>
           </p:sp>
         </mc:Choice>
-        <mc:Fallback>
+        <mc:Fallback xmlns="">
           <p:sp>
             <p:nvSpPr>
               <p:cNvPr id="3" name="Marcador de Posição de Conteúdo 2">
@@ -37471,8 +37478,8 @@
           </a:p>
         </p:txBody>
       </p:sp>
-      <mc:AlternateContent xmlns:mc="http://schemas.openxmlformats.org/markup-compatibility/2006">
-        <mc:Choice xmlns:a14="http://schemas.microsoft.com/office/drawing/2010/main" Requires="a14">
+      <mc:AlternateContent xmlns:mc="http://schemas.openxmlformats.org/markup-compatibility/2006" xmlns:a14="http://schemas.microsoft.com/office/drawing/2010/main">
+        <mc:Choice Requires="a14">
           <p:sp>
             <p:nvSpPr>
               <p:cNvPr id="3" name="Marcador de Posição de Conteúdo 2">
@@ -38220,7 +38227,7 @@
             </p:txBody>
           </p:sp>
         </mc:Choice>
-        <mc:Fallback>
+        <mc:Fallback xmlns="">
           <p:sp>
             <p:nvSpPr>
               <p:cNvPr id="3" name="Marcador de Posição de Conteúdo 2">
